--- a/站立会议记录/第7组程序设计基础实践课程答辩.pptx
+++ b/站立会议记录/第7组程序设计基础实践课程答辩.pptx
@@ -1,6 +1,6 @@
 
 <file path=ppt/presentation.xml><?xml version="1.0" encoding="utf-8"?>
-<p:presentation xmlns:a="http://schemas.openxmlformats.org/drawingml/2006/main" xmlns:r="http://schemas.openxmlformats.org/officeDocument/2006/relationships" xmlns:p="http://schemas.openxmlformats.org/presentationml/2006/main">
+<p:presentation xmlns:a="http://schemas.openxmlformats.org/drawingml/2006/main" xmlns:r="http://schemas.openxmlformats.org/officeDocument/2006/relationships" xmlns:p="http://schemas.openxmlformats.org/presentationml/2006/main" autoCompressPictures="0">
   <p:sldMasterIdLst>
     <p:sldMasterId id="2147483648" r:id="rId1"/>
   </p:sldMasterIdLst>
@@ -10498,7 +10498,7 @@
               </a:tabLst>
             </a:pPr>
             <a:r>
-              <a:rPr sz="1000" spc="-20" dirty="0">
+              <a:rPr sz="1000" spc="-20" dirty="0" err="1">
                 <a:latin typeface="Arial" panose="020B0604020202020204" pitchFamily="34" charset="0"/>
                 <a:ea typeface="微软雅黑" panose="020B0503020204020204" pitchFamily="34" charset="-122"/>
                 <a:cs typeface="Microsoft YaHei"/>
@@ -10506,7 +10506,7 @@
               <a:t>新增枚举类型：</a:t>
             </a:r>
             <a:r>
-              <a:rPr sz="1000" spc="-65" dirty="0">
+              <a:rPr sz="1000" spc="-65" dirty="0" err="1">
                 <a:latin typeface="Arial" panose="020B0604020202020204" pitchFamily="34" charset="0"/>
                 <a:ea typeface="微软雅黑" panose="020B0503020204020204" pitchFamily="34" charset="-122"/>
                 <a:cs typeface="Palatino Linotype"/>
@@ -10522,7 +10522,7 @@
               <a:t> </a:t>
             </a:r>
             <a:r>
-              <a:rPr sz="1000" dirty="0">
+              <a:rPr sz="1000" dirty="0" err="1">
                 <a:latin typeface="Arial" panose="020B0604020202020204" pitchFamily="34" charset="0"/>
                 <a:ea typeface="微软雅黑" panose="020B0503020204020204" pitchFamily="34" charset="-122"/>
                 <a:cs typeface="Palatino Linotype"/>
@@ -10530,15 +10530,15 @@
               <a:t>income</a:t>
             </a:r>
             <a:r>
-              <a:rPr sz="1000" spc="135" dirty="0">
+              <a:rPr lang="en-US" sz="1000" spc="135" dirty="0" err="1">
                 <a:latin typeface="Arial" panose="020B0604020202020204" pitchFamily="34" charset="0"/>
                 <a:ea typeface="微软雅黑" panose="020B0503020204020204" pitchFamily="34" charset="-122"/>
                 <a:cs typeface="Palatino Linotype"/>
               </a:rPr>
-              <a:t> </a:t>
-            </a:r>
-            <a:r>
-              <a:rPr sz="1000" spc="-10" dirty="0">
+              <a:t>_</a:t>
+            </a:r>
+            <a:r>
+              <a:rPr sz="1000" spc="-10" dirty="0" err="1">
                 <a:latin typeface="Arial" panose="020B0604020202020204" pitchFamily="34" charset="0"/>
                 <a:ea typeface="微软雅黑" panose="020B0503020204020204" pitchFamily="34" charset="-122"/>
                 <a:cs typeface="Palatino Linotype"/>
@@ -44638,21 +44638,14 @@
           <p:nvPr/>
         </p:nvPicPr>
         <p:blipFill>
-          <a:blip r:embed="rId8" cstate="print">
-            <a:extLst>
-              <a:ext uri="{28A0092B-C50C-407E-A947-70E740481C1C}">
-                <a14:useLocalDpi xmlns:a14="http://schemas.microsoft.com/office/drawing/2010/main" val="0"/>
-              </a:ext>
-            </a:extLst>
-          </a:blip>
-          <a:stretch>
-            <a:fillRect/>
-          </a:stretch>
+          <a:blip r:embed="rId8"/>
+          <a:srcRect/>
+          <a:stretch/>
         </p:blipFill>
         <p:spPr>
           <a:xfrm>
-            <a:off x="-2096" y="445175"/>
-            <a:ext cx="4610100" cy="2728486"/>
+            <a:off x="402811" y="461411"/>
+            <a:ext cx="3800285" cy="2712250"/>
           </a:xfrm>
           <a:prstGeom prst="rect">
             <a:avLst/>

--- a/站立会议记录/第7组程序设计基础实践课程答辩.pptx
+++ b/站立会议记录/第7组程序设计基础实践课程答辩.pptx
@@ -22161,7 +22161,7 @@
               </a:rPr>
               <a:t>计</a:t>
             </a:r>
-            <a:endParaRPr sz="600">
+            <a:endParaRPr sz="600" dirty="0">
               <a:latin typeface="Arial" panose="020B0604020202020204" pitchFamily="34" charset="0"/>
               <a:ea typeface="微软雅黑" panose="020B0503020204020204" pitchFamily="34" charset="-122"/>
               <a:cs typeface="Microsoft YaHei"/>
@@ -22177,7 +22177,7 @@
               </a:spcBef>
             </a:pPr>
             <a:r>
-              <a:rPr sz="1200" spc="-20" dirty="0">
+              <a:rPr sz="1200" spc="-20" dirty="0" err="1">
                 <a:solidFill>
                   <a:srgbClr val="FFFFFF"/>
                 </a:solidFill>
@@ -22188,7 +22188,7 @@
               <a:t>刘浩洋：</a:t>
             </a:r>
             <a:r>
-              <a:rPr sz="1200" spc="-10" dirty="0">
+              <a:rPr sz="1200" spc="-10" dirty="0" err="1">
                 <a:solidFill>
                   <a:srgbClr val="FFFFFF"/>
                 </a:solidFill>
@@ -22210,17 +22210,17 @@
               <a:t> </a:t>
             </a:r>
             <a:r>
-              <a:rPr sz="1200" spc="-30" dirty="0">
+              <a:rPr lang="zh-CN" altLang="en-US" sz="1200" spc="100" dirty="0">
                 <a:solidFill>
                   <a:srgbClr val="FFFFFF"/>
                 </a:solidFill>
                 <a:latin typeface="Arial" panose="020B0604020202020204" pitchFamily="34" charset="0"/>
                 <a:ea typeface="微软雅黑" panose="020B0503020204020204" pitchFamily="34" charset="-122"/>
-                <a:cs typeface="Microsoft YaHei"/>
-              </a:rPr>
-              <a:t>核心职责</a:t>
-            </a:r>
-            <a:endParaRPr sz="1200">
+                <a:cs typeface="Palatino Linotype"/>
+              </a:rPr>
+              <a:t>设计</a:t>
+            </a:r>
+            <a:endParaRPr sz="1200" dirty="0">
               <a:latin typeface="Arial" panose="020B0604020202020204" pitchFamily="34" charset="0"/>
               <a:ea typeface="微软雅黑" panose="020B0503020204020204" pitchFamily="34" charset="-122"/>
               <a:cs typeface="Microsoft YaHei"/>
